--- a/power point/Sid Diamond. Msci Poster.pptx
+++ b/power point/Sid Diamond. Msci Poster.pptx
@@ -4858,8 +4858,8 @@
           </a:p>
         </p:txBody>
       </p:sp>
-      <mc:AlternateContent xmlns:mc="http://schemas.openxmlformats.org/markup-compatibility/2006">
-        <mc:Choice xmlns:a14="http://schemas.microsoft.com/office/drawing/2010/main" Requires="a14">
+      <mc:AlternateContent xmlns:mc="http://schemas.openxmlformats.org/markup-compatibility/2006" xmlns:a14="http://schemas.microsoft.com/office/drawing/2010/main">
+        <mc:Choice Requires="a14">
           <p:sp>
             <p:nvSpPr>
               <p:cNvPr id="77" name="Text Placeholder 76">
@@ -4905,15 +4905,21 @@
                 <a14:m>
                   <m:oMath xmlns:m="http://schemas.openxmlformats.org/officeDocument/2006/math">
                     <m:r>
-                      <a:rPr lang="en-GB" i="1"/>
+                      <a:rPr lang="en-GB" i="1">
+                        <a:latin typeface="Cambria Math" panose="02040503050406030204" pitchFamily="18" charset="0"/>
+                      </a:rPr>
                       <m:t>𝑘</m:t>
                     </m:r>
                     <m:r>
-                      <a:rPr lang="en-GB"/>
+                      <a:rPr lang="en-GB">
+                        <a:latin typeface="Cambria Math" panose="02040503050406030204" pitchFamily="18" charset="0"/>
+                      </a:rPr>
                       <m:t>=</m:t>
                     </m:r>
                     <m:r>
-                      <a:rPr lang="en-GB"/>
+                      <a:rPr lang="en-GB">
+                        <a:latin typeface="Cambria Math" panose="02040503050406030204" pitchFamily="18" charset="0"/>
+                      </a:rPr>
                       <m:t>0</m:t>
                     </m:r>
                   </m:oMath>
@@ -4925,27 +4931,39 @@
                 <a14:m>
                   <m:oMath xmlns:m="http://schemas.openxmlformats.org/officeDocument/2006/math">
                     <m:r>
-                      <a:rPr lang="en-GB"/>
+                      <a:rPr lang="en-GB">
+                        <a:latin typeface="Cambria Math" panose="02040503050406030204" pitchFamily="18" charset="0"/>
+                      </a:rPr>
                       <m:t>∣</m:t>
                     </m:r>
                     <m:r>
-                      <a:rPr lang="en-GB" i="1"/>
+                      <a:rPr lang="en-GB" i="1">
+                        <a:latin typeface="Cambria Math" panose="02040503050406030204" pitchFamily="18" charset="0"/>
+                      </a:rPr>
                       <m:t>𝑘</m:t>
                     </m:r>
                     <m:r>
-                      <a:rPr lang="en-GB"/>
+                      <a:rPr lang="en-GB">
+                        <a:latin typeface="Cambria Math" panose="02040503050406030204" pitchFamily="18" charset="0"/>
+                      </a:rPr>
                       <m:t>∣&lt;</m:t>
                     </m:r>
                     <m:r>
-                      <a:rPr lang="en-GB"/>
+                      <a:rPr lang="en-GB">
+                        <a:latin typeface="Cambria Math" panose="02040503050406030204" pitchFamily="18" charset="0"/>
+                      </a:rPr>
                       <m:t>0</m:t>
                     </m:r>
                     <m:r>
-                      <a:rPr lang="en-GB"/>
+                      <a:rPr lang="en-GB">
+                        <a:latin typeface="Cambria Math" panose="02040503050406030204" pitchFamily="18" charset="0"/>
+                      </a:rPr>
                       <m:t>.</m:t>
                     </m:r>
                     <m:r>
-                      <a:rPr lang="en-GB"/>
+                      <a:rPr lang="en-GB">
+                        <a:latin typeface="Cambria Math" panose="02040503050406030204" pitchFamily="18" charset="0"/>
+                      </a:rPr>
                       <m:t>1</m:t>
                     </m:r>
                   </m:oMath>
@@ -4957,34 +4975,46 @@
                 <a14:m>
                   <m:oMath xmlns:m="http://schemas.openxmlformats.org/officeDocument/2006/math">
                     <m:r>
-                      <a:rPr lang="en-GB" i="1"/>
+                      <a:rPr lang="en-GB" i="1">
+                        <a:latin typeface="Cambria Math" panose="02040503050406030204" pitchFamily="18" charset="0"/>
+                      </a:rPr>
                       <m:t>𝑁</m:t>
                     </m:r>
                     <m:r>
-                      <a:rPr lang="en-GB"/>
+                      <a:rPr lang="en-GB">
+                        <a:latin typeface="Cambria Math" panose="02040503050406030204" pitchFamily="18" charset="0"/>
+                      </a:rPr>
                       <m:t>=</m:t>
                     </m:r>
                     <m:sSub>
                       <m:sSubPr>
                         <m:ctrlPr>
-                          <a:rPr lang="ar-AE" i="1"/>
+                          <a:rPr lang="ar-AE" i="1">
+                            <a:latin typeface="Cambria Math" panose="02040503050406030204" pitchFamily="18" charset="0"/>
+                          </a:rPr>
                         </m:ctrlPr>
                       </m:sSubPr>
                       <m:e>
                         <m:r>
-                          <a:rPr lang="ar-AE" i="1"/>
+                          <a:rPr lang="ar-AE" i="1">
+                            <a:latin typeface="Cambria Math" panose="02040503050406030204" pitchFamily="18" charset="0"/>
+                          </a:rPr>
                           <m:t>𝑛</m:t>
                         </m:r>
                       </m:e>
                       <m:sub>
                         <m:r>
-                          <a:rPr lang="ar-AE"/>
+                          <a:rPr lang="ar-AE">
+                            <a:latin typeface="Cambria Math" panose="02040503050406030204" pitchFamily="18" charset="0"/>
+                          </a:rPr>
                           <m:t>0</m:t>
                         </m:r>
                       </m:sub>
                     </m:sSub>
                     <m:r>
-                      <a:rPr lang="ar-AE"/>
+                      <a:rPr lang="ar-AE">
+                        <a:latin typeface="Cambria Math" panose="02040503050406030204" pitchFamily="18" charset="0"/>
+                      </a:rPr>
                       <m:t>+</m:t>
                     </m:r>
                     <m:r>
@@ -5014,7 +5044,9 @@
                     <m:sSub>
                       <m:sSubPr>
                         <m:ctrlPr>
-                          <a:rPr lang="ar-AE"/>
+                          <a:rPr lang="ar-AE" i="1">
+                            <a:latin typeface="Cambria Math" panose="02040503050406030204" pitchFamily="18" charset="0"/>
+                          </a:rPr>
                         </m:ctrlPr>
                       </m:sSubPr>
                       <m:e>
@@ -5025,13 +5057,17 @@
                           <m:t> </m:t>
                         </m:r>
                         <m:r>
-                          <a:rPr lang="ar-AE" i="1"/>
+                          <a:rPr lang="ar-AE" i="1">
+                            <a:latin typeface="Cambria Math" panose="02040503050406030204" pitchFamily="18" charset="0"/>
+                          </a:rPr>
                           <m:t>𝑛</m:t>
                         </m:r>
                       </m:e>
                       <m:sub>
                         <m:r>
-                          <a:rPr lang="ar-AE"/>
+                          <a:rPr lang="ar-AE">
+                            <a:latin typeface="Cambria Math" panose="02040503050406030204" pitchFamily="18" charset="0"/>
+                          </a:rPr>
                           <m:t>0</m:t>
                         </m:r>
                       </m:sub>
@@ -5057,7 +5093,9 @@
                 <a14:m>
                   <m:oMath xmlns:m="http://schemas.openxmlformats.org/officeDocument/2006/math">
                     <m:r>
-                      <a:rPr lang="en-GB" i="1"/>
+                      <a:rPr lang="en-GB" i="1">
+                        <a:latin typeface="Cambria Math" panose="02040503050406030204" pitchFamily="18" charset="0"/>
+                      </a:rPr>
                       <m:t>𝑚</m:t>
                     </m:r>
                     <m:r>
@@ -5081,7 +5119,9 @@
                 <a14:m>
                   <m:oMath xmlns:m="http://schemas.openxmlformats.org/officeDocument/2006/math">
                     <m:r>
-                      <a:rPr lang="en-GB" i="1"/>
+                      <a:rPr lang="en-GB" i="1">
+                        <a:latin typeface="Cambria Math" panose="02040503050406030204" pitchFamily="18" charset="0"/>
+                      </a:rPr>
                       <m:t>h</m:t>
                     </m:r>
                     <m:r>
@@ -5119,18 +5159,24 @@
                     <m:sSub>
                       <m:sSubPr>
                         <m:ctrlPr>
-                          <a:rPr lang="ar-AE"/>
+                          <a:rPr lang="ar-AE" i="1">
+                            <a:latin typeface="Cambria Math" panose="02040503050406030204" pitchFamily="18" charset="0"/>
+                          </a:rPr>
                         </m:ctrlPr>
                       </m:sSubPr>
                       <m:e>
                         <m:r>
-                          <a:rPr lang="ar-AE" i="1"/>
+                          <a:rPr lang="ar-AE" i="1">
+                            <a:latin typeface="Cambria Math" panose="02040503050406030204" pitchFamily="18" charset="0"/>
+                          </a:rPr>
                           <m:t>𝑓</m:t>
                         </m:r>
                       </m:e>
                       <m:sub>
                         <m:r>
-                          <a:rPr lang="ar-AE" i="1"/>
+                          <a:rPr lang="ar-AE" i="1">
+                            <a:latin typeface="Cambria Math" panose="02040503050406030204" pitchFamily="18" charset="0"/>
+                          </a:rPr>
                           <m:t>𝑎</m:t>
                         </m:r>
                       </m:sub>
@@ -5175,7 +5221,7 @@
             </p:txBody>
           </p:sp>
         </mc:Choice>
-        <mc:Fallback>
+        <mc:Fallback xmlns="">
           <p:sp>
             <p:nvSpPr>
               <p:cNvPr id="77" name="Text Placeholder 76">
@@ -5496,8 +5542,8 @@
           </a:p>
         </p:txBody>
       </p:sp>
-      <mc:AlternateContent xmlns:mc="http://schemas.openxmlformats.org/markup-compatibility/2006">
-        <mc:Choice xmlns:a14="http://schemas.microsoft.com/office/drawing/2010/main" Requires="a14">
+      <mc:AlternateContent xmlns:mc="http://schemas.openxmlformats.org/markup-compatibility/2006" xmlns:a14="http://schemas.microsoft.com/office/drawing/2010/main">
+        <mc:Choice Requires="a14">
           <p:sp>
             <p:nvSpPr>
               <p:cNvPr id="54" name="TextBox 53">
@@ -5934,13 +5980,12 @@
                 <a:endParaRPr lang="en-GB" sz="2600" dirty="0"/>
               </a:p>
               <a:p>
-                <a:pPr/>
                 <a:endParaRPr lang="en-GB" sz="2600" dirty="0"/>
               </a:p>
             </p:txBody>
           </p:sp>
         </mc:Choice>
-        <mc:Fallback>
+        <mc:Fallback xmlns="">
           <p:sp>
             <p:nvSpPr>
               <p:cNvPr id="54" name="TextBox 53">
@@ -6023,8 +6068,12 @@
               <a:t>Fig 1:  </a:t>
             </a:r>
             <a:r>
+              <a:rPr lang="en-GB" sz="1000"/>
+              <a:t>Directed acyclic graph </a:t>
+            </a:r>
+            <a:r>
               <a:rPr lang="en-GB" sz="1000" dirty="0"/>
-              <a:t>Directed Acyclic Graph DAG diagram containing 6 nodes, labelled from one to six. Directed edges connect the nodes.  </a:t>
+              <a:t>(DAG) diagram containing 6 nodes, labelled from one to six. Directed edges connect the nodes.  </a:t>
             </a:r>
             <a:endParaRPr lang="en-GB" sz="1000" dirty="0">
               <a:solidFill>
@@ -6034,8 +6083,8 @@
           </a:p>
         </p:txBody>
       </p:sp>
-      <mc:AlternateContent xmlns:mc="http://schemas.openxmlformats.org/markup-compatibility/2006">
-        <mc:Choice xmlns:a14="http://schemas.microsoft.com/office/drawing/2010/main" Requires="a14">
+      <mc:AlternateContent xmlns:mc="http://schemas.openxmlformats.org/markup-compatibility/2006" xmlns:a14="http://schemas.microsoft.com/office/drawing/2010/main">
+        <mc:Choice Requires="a14">
           <p:sp>
             <p:nvSpPr>
               <p:cNvPr id="63" name="TextBox 62">
@@ -6343,7 +6392,7 @@
             </p:txBody>
           </p:sp>
         </mc:Choice>
-        <mc:Fallback>
+        <mc:Fallback xmlns="">
           <p:sp>
             <p:nvSpPr>
               <p:cNvPr id="63" name="TextBox 62">
@@ -6388,8 +6437,8 @@
           </p:sp>
         </mc:Fallback>
       </mc:AlternateContent>
-      <mc:AlternateContent xmlns:mc="http://schemas.openxmlformats.org/markup-compatibility/2006">
-        <mc:Choice xmlns:a14="http://schemas.microsoft.com/office/drawing/2010/main" Requires="a14">
+      <mc:AlternateContent xmlns:mc="http://schemas.openxmlformats.org/markup-compatibility/2006" xmlns:a14="http://schemas.microsoft.com/office/drawing/2010/main">
+        <mc:Choice Requires="a14">
           <p:sp>
             <p:nvSpPr>
               <p:cNvPr id="65" name="TextBox 64">
@@ -6681,7 +6730,7 @@
             </p:txBody>
           </p:sp>
         </mc:Choice>
-        <mc:Fallback>
+        <mc:Fallback xmlns="">
           <p:sp>
             <p:nvSpPr>
               <p:cNvPr id="65" name="TextBox 64">
@@ -7025,7 +7074,9 @@
                 <a14:m>
                   <m:oMath xmlns:m="http://schemas.openxmlformats.org/officeDocument/2006/math">
                     <m:r>
-                      <a:rPr lang="en-GB" i="1"/>
+                      <a:rPr lang="en-GB" i="1">
+                        <a:latin typeface="Cambria Math" panose="02040503050406030204" pitchFamily="18" charset="0"/>
+                      </a:rPr>
                       <m:t>𝑚</m:t>
                     </m:r>
                     <m:r>
@@ -7045,18 +7096,24 @@
                     <m:sSub>
                       <m:sSubPr>
                         <m:ctrlPr>
-                          <a:rPr lang="ar-AE" smtClean="0"/>
+                          <a:rPr lang="ar-AE" i="1" smtClean="0">
+                            <a:latin typeface="Cambria Math" panose="02040503050406030204" pitchFamily="18" charset="0"/>
+                          </a:rPr>
                         </m:ctrlPr>
                       </m:sSubPr>
                       <m:e>
                         <m:r>
-                          <a:rPr lang="ar-AE" i="1"/>
+                          <a:rPr lang="ar-AE" i="1">
+                            <a:latin typeface="Cambria Math" panose="02040503050406030204" pitchFamily="18" charset="0"/>
+                          </a:rPr>
                           <m:t>𝑛</m:t>
                         </m:r>
                       </m:e>
                       <m:sub>
                         <m:r>
-                          <a:rPr lang="ar-AE"/>
+                          <a:rPr lang="ar-AE">
+                            <a:latin typeface="Cambria Math" panose="02040503050406030204" pitchFamily="18" charset="0"/>
+                          </a:rPr>
                           <m:t>0</m:t>
                         </m:r>
                       </m:sub>
@@ -7071,7 +7128,7 @@
                 </a14:m>
                 <a:r>
                   <a:rPr lang="en-GB" dirty="0"/>
-                  <a:t>initial nodes in our model, (vertical axis). The colour scale shows the fraction of edges retained, from 0 (dark) to 1 (bright yellow), where a value of 1 indicates that all edges in are within the regime where our </a:t>
+                  <a:t>initial nodes in our model, (vertical axis). The colour scale shows the fraction of edges retained, from 0 (dark) to 1 (bright yellow), where a value of 1 indicates that all edges are within the regime where our </a:t>
                 </a:r>
                 <a:r>
                   <a:rPr lang="en-GB" dirty="0" err="1"/>
@@ -7086,18 +7143,24 @@
                     <m:sSub>
                       <m:sSubPr>
                         <m:ctrlPr>
-                          <a:rPr lang="ar-AE"/>
+                          <a:rPr lang="ar-AE" i="1">
+                            <a:latin typeface="Cambria Math" panose="02040503050406030204" pitchFamily="18" charset="0"/>
+                          </a:rPr>
                         </m:ctrlPr>
                       </m:sSubPr>
                       <m:e>
                         <m:r>
-                          <a:rPr lang="ar-AE" i="1"/>
+                          <a:rPr lang="ar-AE" i="1">
+                            <a:latin typeface="Cambria Math" panose="02040503050406030204" pitchFamily="18" charset="0"/>
+                          </a:rPr>
                           <m:t>𝑃</m:t>
                         </m:r>
                       </m:e>
                       <m:sub>
                         <m:r>
-                          <a:rPr lang="ar-AE" i="1"/>
+                          <a:rPr lang="ar-AE" i="1">
+                            <a:latin typeface="Cambria Math" panose="02040503050406030204" pitchFamily="18" charset="0"/>
+                          </a:rPr>
                           <m:t>𝑐</m:t>
                         </m:r>
                       </m:sub>
@@ -7374,7 +7437,7 @@
                 </a:r>
                 <a:r>
                   <a:rPr lang="en-GB" dirty="0"/>
-                  <a:t> Fraction of nodes for which  equation (1) passes our </a:t>
+                  <a:t> Fraction of papers for which  equation (1) passes our </a:t>
                 </a:r>
                 <a:r>
                   <a:rPr lang="en-GB" dirty="0" err="1"/>
@@ -7435,7 +7498,7 @@
                 </a14:m>
                 <a:r>
                   <a:rPr lang="en-GB" dirty="0"/>
-                  <a:t> initial papers in our model, (vertical axis). The colour scale shows the fraction of nodes retained, from 0 (dark) to 1 (bright yellow), where a value of 1 indicates that all edges in are within the regime where our </a:t>
+                  <a:t> initial papers in our model, (vertical axis). The colour scale shows the fraction of papers retained, from 0 (dark) to 1 (bright yellow), where a value of 1 indicates that all papers are within the regime where our </a:t>
                 </a:r>
                 <a:r>
                   <a:rPr lang="en-GB" dirty="0" err="1"/>
@@ -7534,8 +7597,8 @@
           </p:sp>
         </mc:Fallback>
       </mc:AlternateContent>
-      <mc:AlternateContent xmlns:mc="http://schemas.openxmlformats.org/markup-compatibility/2006">
-        <mc:Choice xmlns:a14="http://schemas.microsoft.com/office/drawing/2010/main" Requires="a14">
+      <mc:AlternateContent xmlns:mc="http://schemas.openxmlformats.org/markup-compatibility/2006" xmlns:a14="http://schemas.microsoft.com/office/drawing/2010/main">
+        <mc:Choice Requires="a14">
           <p:sp>
             <p:nvSpPr>
               <p:cNvPr id="88" name="TextBox 87">
@@ -8032,7 +8095,6 @@
                 </a:endParaRPr>
               </a:p>
               <a:p>
-                <a:pPr/>
                 <a14:m>
                   <m:oMath xmlns:m="http://schemas.openxmlformats.org/officeDocument/2006/math">
                     <m:sSub>
@@ -8235,7 +8297,7 @@
             </p:txBody>
           </p:sp>
         </mc:Choice>
-        <mc:Fallback>
+        <mc:Fallback xmlns="">
           <p:sp>
             <p:nvSpPr>
               <p:cNvPr id="88" name="TextBox 87">
@@ -8319,8 +8381,8 @@
           </a:p>
         </p:txBody>
       </p:sp>
-      <mc:AlternateContent xmlns:mc="http://schemas.openxmlformats.org/markup-compatibility/2006">
-        <mc:Choice xmlns:a14="http://schemas.microsoft.com/office/drawing/2010/main" Requires="a14">
+      <mc:AlternateContent xmlns:mc="http://schemas.openxmlformats.org/markup-compatibility/2006" xmlns:a14="http://schemas.microsoft.com/office/drawing/2010/main">
+        <mc:Choice Requires="a14">
           <p:sp>
             <p:nvSpPr>
               <p:cNvPr id="91" name="TextBox 90">
@@ -8873,27 +8935,7 @@
                             <a:latin typeface="Cambria Math" panose="02040503050406030204" pitchFamily="18" charset="0"/>
                             <a:ea typeface="Cambria Math" panose="02040503050406030204" pitchFamily="18" charset="0"/>
                           </a:rPr>
-                          <m:t>  </m:t>
-                        </m:r>
-                        <m:r>
-                          <a:rPr lang="en-GB" sz="2600" b="0" i="1" smtClean="0">
-                            <a:solidFill>
-                              <a:schemeClr val="tx1"/>
-                            </a:solidFill>
-                            <a:latin typeface="Cambria Math" panose="02040503050406030204" pitchFamily="18" charset="0"/>
-                            <a:ea typeface="Cambria Math" panose="02040503050406030204" pitchFamily="18" charset="0"/>
-                          </a:rPr>
-                          <m:t>  </m:t>
-                        </m:r>
-                        <m:r>
-                          <a:rPr lang="en-GB" sz="2600" b="0" i="1" smtClean="0">
-                            <a:solidFill>
-                              <a:schemeClr val="tx1"/>
-                            </a:solidFill>
-                            <a:latin typeface="Cambria Math" panose="02040503050406030204" pitchFamily="18" charset="0"/>
-                            <a:ea typeface="Cambria Math" panose="02040503050406030204" pitchFamily="18" charset="0"/>
-                          </a:rPr>
-                          <m:t>(</m:t>
+                          <m:t>    (</m:t>
                         </m:r>
                         <m:r>
                           <a:rPr lang="en-GB" sz="2600" b="0" i="1" smtClean="0">
@@ -8931,7 +8973,7 @@
             </p:txBody>
           </p:sp>
         </mc:Choice>
-        <mc:Fallback>
+        <mc:Fallback xmlns="">
           <p:sp>
             <p:nvSpPr>
               <p:cNvPr id="91" name="TextBox 90">
@@ -8976,8 +9018,8 @@
           </p:sp>
         </mc:Fallback>
       </mc:AlternateContent>
-      <mc:AlternateContent xmlns:mc="http://schemas.openxmlformats.org/markup-compatibility/2006">
-        <mc:Choice xmlns:a14="http://schemas.microsoft.com/office/drawing/2010/main" Requires="a14">
+      <mc:AlternateContent xmlns:mc="http://schemas.openxmlformats.org/markup-compatibility/2006" xmlns:a14="http://schemas.microsoft.com/office/drawing/2010/main">
+        <mc:Choice Requires="a14">
           <p:sp>
             <p:nvSpPr>
               <p:cNvPr id="92" name="TextBox 91">
@@ -9256,7 +9298,7 @@
             </p:txBody>
           </p:sp>
         </mc:Choice>
-        <mc:Fallback>
+        <mc:Fallback xmlns="">
           <p:sp>
             <p:nvSpPr>
               <p:cNvPr id="92" name="TextBox 91">
@@ -9337,8 +9379,8 @@
           </a:prstGeom>
         </p:spPr>
       </p:pic>
-      <mc:AlternateContent xmlns:mc="http://schemas.openxmlformats.org/markup-compatibility/2006">
-        <mc:Choice xmlns:a14="http://schemas.microsoft.com/office/drawing/2010/main" Requires="a14">
+      <mc:AlternateContent xmlns:mc="http://schemas.openxmlformats.org/markup-compatibility/2006" xmlns:a14="http://schemas.microsoft.com/office/drawing/2010/main">
+        <mc:Choice Requires="a14">
           <p:sp>
             <p:nvSpPr>
               <p:cNvPr id="2" name="TextBox 1">
@@ -9901,7 +9943,7 @@
             </p:txBody>
           </p:sp>
         </mc:Choice>
-        <mc:Fallback>
+        <mc:Fallback xmlns="">
           <p:sp>
             <p:nvSpPr>
               <p:cNvPr id="2" name="TextBox 1">
@@ -9946,8 +9988,8 @@
           </p:sp>
         </mc:Fallback>
       </mc:AlternateContent>
-      <mc:AlternateContent xmlns:mc="http://schemas.openxmlformats.org/markup-compatibility/2006">
-        <mc:Choice xmlns:a14="http://schemas.microsoft.com/office/drawing/2010/main" Requires="a14">
+      <mc:AlternateContent xmlns:mc="http://schemas.openxmlformats.org/markup-compatibility/2006" xmlns:a14="http://schemas.microsoft.com/office/drawing/2010/main">
+        <mc:Choice Requires="a14">
           <p:sp>
             <p:nvSpPr>
               <p:cNvPr id="5" name="TextBox 4">
@@ -10168,7 +10210,7 @@
             </p:txBody>
           </p:sp>
         </mc:Choice>
-        <mc:Fallback>
+        <mc:Fallback xmlns="">
           <p:sp>
             <p:nvSpPr>
               <p:cNvPr id="5" name="TextBox 4">
@@ -10213,8 +10255,8 @@
           </p:sp>
         </mc:Fallback>
       </mc:AlternateContent>
-      <mc:AlternateContent xmlns:mc="http://schemas.openxmlformats.org/markup-compatibility/2006">
-        <mc:Choice xmlns:a14="http://schemas.microsoft.com/office/drawing/2010/main" Requires="a14">
+      <mc:AlternateContent xmlns:mc="http://schemas.openxmlformats.org/markup-compatibility/2006" xmlns:a14="http://schemas.microsoft.com/office/drawing/2010/main">
+        <mc:Choice Requires="a14">
           <p:sp>
             <p:nvSpPr>
               <p:cNvPr id="9" name="TextBox 8">
@@ -10371,7 +10413,7 @@
             </p:txBody>
           </p:sp>
         </mc:Choice>
-        <mc:Fallback>
+        <mc:Fallback xmlns="">
           <p:sp>
             <p:nvSpPr>
               <p:cNvPr id="9" name="TextBox 8">
